--- a/slides.pptx
+++ b/slides.pptx
@@ -114,34 +114,34 @@
   <p:extLst>
     <p:ext uri="{521415D9-36F7-43E2-AB2F-B90AF26B5E84}">
       <p14:sectionLst xmlns:p14="http://schemas.microsoft.com/office/powerpoint/2010/main">
-        <p14:section name="Opening" id="{7448625f-3747-a97a-2677-1c76734bd032}">
+        <p14:section name="Opening" id="{cd6e3031-18a7-5025-d6f6-52a74899878a}">
           <p14:sldIdLst>
             <p14:sldId id="256"/>
           </p14:sldIdLst>
         </p14:section>
-        <p14:section name="Problem" id="{1fc746b7-5eeb-efcd-465a-19933b1f9b96}">
+        <p14:section name="Problem" id="{e7f67ee4-6585-4779-e221-1a8d93dd7dd7}">
           <p14:sldIdLst>
             <p14:sldId id="257"/>
           </p14:sldIdLst>
         </p14:section>
-        <p14:section name="Encoding" id="{638b9ace-a34b-4dec-c19d-bb7ccd7d5397}">
+        <p14:section name="Encoding" id="{bd4aa96d-c7c4-6ca3-c9e6-548a961fe838}">
           <p14:sldIdLst>
             <p14:sldId id="258"/>
           </p14:sldIdLst>
         </p14:section>
-        <p14:section name="Checks" id="{722210e4-5964-66fc-3ada-5e2998f64a26}">
+        <p14:section name="Checks" id="{e59eef75-3803-1c78-8461-373e55cc3b6f}">
           <p14:sldIdLst>
             <p14:sldId id="259"/>
           </p14:sldIdLst>
         </p14:section>
-        <p14:section name="Results" id="{1fd878d4-1194-ca0a-9dd5-6f1f89538fb4}">
+        <p14:section name="Results" id="{4221548c-39d5-70f9-8c5b-36c18da9952e}">
           <p14:sldIdLst>
             <p14:sldId id="260"/>
             <p14:sldId id="261"/>
             <p14:sldId id="262"/>
           </p14:sldIdLst>
         </p14:section>
-        <p14:section name="Closing" id="{2d93179a-7114-b54a-4d71-6129e06a5f0e}">
+        <p14:section name="Closing" id="{91159f04-97a0-d42b-dc69-a91a76e65a34}">
           <p14:sldIdLst>
             <p14:sldId id="263"/>
           </p14:sldIdLst>
@@ -2127,7 +2127,7 @@
                   <a:srgbClr val="C9C5DC"/>
                 </a:solidFill>
               </a:rPr>
-              <a:t>Half the qubits, no penalty terms, and a 45% hit rate against a 0.146% random baseline.</a:t>
+              <a:t>Half the qubits, no penalty terms, and a 44% hit rate on AWS SV1 against a 0.146% random baseline.</a:t>
             </a:r>
             <a:endParaRPr lang="en-US" sz="1600" dirty="0"/>
           </a:p>
@@ -5680,7 +5680,7 @@
                             <a:srgbClr val="17152B"/>
                           </a:solidFill>
                         </a:rPr>
-                        <a:t>44.62%</a:t>
+                        <a:t>44.20%</a:t>
                       </a:r>
                       <a:endParaRPr lang="en-US" sz="1200" dirty="0"/>
                     </a:p>
@@ -5802,7 +5802,7 @@
                             <a:srgbClr val="17152B"/>
                           </a:solidFill>
                         </a:rPr>
-                        <a:t>×305</a:t>
+                        <a:t>×302</a:t>
                       </a:r>
                       <a:endParaRPr lang="en-US" sz="1200" dirty="0"/>
                     </a:p>
@@ -6708,6 +6708,435 @@
                   </a:tcPr>
                 </a:tc>
               </a:tr>
+              <a:tr h="310896">
+                <a:tc>
+                  <a:txBody>
+                    <a:bodyPr/>
+                    <a:lstStyle/>
+                    <a:p>
+                      <a:pPr algn="ctr" indent="0" marL="0">
+                        <a:buNone/>
+                      </a:pPr>
+                      <a:r>
+                        <a:rPr lang="en-US" sz="1200" dirty="0">
+                          <a:solidFill>
+                            <a:srgbClr val="17152B"/>
+                          </a:solidFill>
+                        </a:rPr>
+                        <a:t>7</a:t>
+                      </a:r>
+                      <a:endParaRPr lang="en-US" sz="1200" dirty="0"/>
+                    </a:p>
+                  </a:txBody>
+                  <a:tcPr marL="91440" marR="91440" marT="45720" marB="45720" anchor="ctr">
+                    <a:lnL w="12700" cap="flat" cmpd="sng" algn="ctr">
+                      <a:solidFill>
+                        <a:srgbClr val="DDDAE8"/>
+                      </a:solidFill>
+                      <a:prstDash val="solid"/>
+                      <a:round/>
+                      <a:headEnd type="none" w="med" len="med"/>
+                      <a:tailEnd type="none" w="med" len="med"/>
+                    </a:lnL>
+                    <a:lnR w="12700" cap="flat" cmpd="sng" algn="ctr">
+                      <a:solidFill>
+                        <a:srgbClr val="DDDAE8"/>
+                      </a:solidFill>
+                      <a:prstDash val="solid"/>
+                      <a:round/>
+                      <a:headEnd type="none" w="med" len="med"/>
+                      <a:tailEnd type="none" w="med" len="med"/>
+                    </a:lnR>
+                    <a:lnT w="12700" cap="flat" cmpd="sng" algn="ctr">
+                      <a:solidFill>
+                        <a:srgbClr val="DDDAE8"/>
+                      </a:solidFill>
+                      <a:prstDash val="solid"/>
+                      <a:round/>
+                      <a:headEnd type="none" w="med" len="med"/>
+                      <a:tailEnd type="none" w="med" len="med"/>
+                    </a:lnT>
+                    <a:lnB w="12700" cap="flat" cmpd="sng" algn="ctr">
+                      <a:solidFill>
+                        <a:srgbClr val="DDDAE8"/>
+                      </a:solidFill>
+                      <a:prstDash val="solid"/>
+                      <a:round/>
+                      <a:headEnd type="none" w="med" len="med"/>
+                      <a:tailEnd type="none" w="med" len="med"/>
+                    </a:lnB>
+                    <a:solidFill>
+                      <a:srgbClr val="FFFFFF"/>
+                    </a:solidFill>
+                  </a:tcPr>
+                </a:tc>
+                <a:tc>
+                  <a:txBody>
+                    <a:bodyPr/>
+                    <a:lstStyle/>
+                    <a:p>
+                      <a:pPr algn="ctr" indent="0" marL="0">
+                        <a:buNone/>
+                      </a:pPr>
+                      <a:r>
+                        <a:rPr lang="en-US" sz="1200" dirty="0">
+                          <a:solidFill>
+                            <a:srgbClr val="17152B"/>
+                          </a:solidFill>
+                        </a:rPr>
+                        <a:t>21</a:t>
+                      </a:r>
+                      <a:endParaRPr lang="en-US" sz="1200" dirty="0"/>
+                    </a:p>
+                  </a:txBody>
+                  <a:tcPr marL="91440" marR="91440" marT="45720" marB="45720" anchor="ctr">
+                    <a:lnL w="12700" cap="flat" cmpd="sng" algn="ctr">
+                      <a:solidFill>
+                        <a:srgbClr val="DDDAE8"/>
+                      </a:solidFill>
+                      <a:prstDash val="solid"/>
+                      <a:round/>
+                      <a:headEnd type="none" w="med" len="med"/>
+                      <a:tailEnd type="none" w="med" len="med"/>
+                    </a:lnL>
+                    <a:lnR w="12700" cap="flat" cmpd="sng" algn="ctr">
+                      <a:solidFill>
+                        <a:srgbClr val="DDDAE8"/>
+                      </a:solidFill>
+                      <a:prstDash val="solid"/>
+                      <a:round/>
+                      <a:headEnd type="none" w="med" len="med"/>
+                      <a:tailEnd type="none" w="med" len="med"/>
+                    </a:lnR>
+                    <a:lnT w="12700" cap="flat" cmpd="sng" algn="ctr">
+                      <a:solidFill>
+                        <a:srgbClr val="DDDAE8"/>
+                      </a:solidFill>
+                      <a:prstDash val="solid"/>
+                      <a:round/>
+                      <a:headEnd type="none" w="med" len="med"/>
+                      <a:tailEnd type="none" w="med" len="med"/>
+                    </a:lnT>
+                    <a:lnB w="12700" cap="flat" cmpd="sng" algn="ctr">
+                      <a:solidFill>
+                        <a:srgbClr val="DDDAE8"/>
+                      </a:solidFill>
+                      <a:prstDash val="solid"/>
+                      <a:round/>
+                      <a:headEnd type="none" w="med" len="med"/>
+                      <a:tailEnd type="none" w="med" len="med"/>
+                    </a:lnB>
+                    <a:solidFill>
+                      <a:srgbClr val="FFFFFF"/>
+                    </a:solidFill>
+                  </a:tcPr>
+                </a:tc>
+                <a:tc>
+                  <a:txBody>
+                    <a:bodyPr/>
+                    <a:lstStyle/>
+                    <a:p>
+                      <a:pPr algn="ctr" indent="0" marL="0">
+                        <a:buNone/>
+                      </a:pPr>
+                      <a:r>
+                        <a:rPr lang="en-US" sz="1200" dirty="0">
+                          <a:solidFill>
+                            <a:srgbClr val="17152B"/>
+                          </a:solidFill>
+                        </a:rPr>
+                        <a:t>1686</a:t>
+                      </a:r>
+                      <a:endParaRPr lang="en-US" sz="1200" dirty="0"/>
+                    </a:p>
+                  </a:txBody>
+                  <a:tcPr marL="91440" marR="91440" marT="45720" marB="45720" anchor="ctr">
+                    <a:lnL w="12700" cap="flat" cmpd="sng" algn="ctr">
+                      <a:solidFill>
+                        <a:srgbClr val="DDDAE8"/>
+                      </a:solidFill>
+                      <a:prstDash val="solid"/>
+                      <a:round/>
+                      <a:headEnd type="none" w="med" len="med"/>
+                      <a:tailEnd type="none" w="med" len="med"/>
+                    </a:lnL>
+                    <a:lnR w="12700" cap="flat" cmpd="sng" algn="ctr">
+                      <a:solidFill>
+                        <a:srgbClr val="DDDAE8"/>
+                      </a:solidFill>
+                      <a:prstDash val="solid"/>
+                      <a:round/>
+                      <a:headEnd type="none" w="med" len="med"/>
+                      <a:tailEnd type="none" w="med" len="med"/>
+                    </a:lnR>
+                    <a:lnT w="12700" cap="flat" cmpd="sng" algn="ctr">
+                      <a:solidFill>
+                        <a:srgbClr val="DDDAE8"/>
+                      </a:solidFill>
+                      <a:prstDash val="solid"/>
+                      <a:round/>
+                      <a:headEnd type="none" w="med" len="med"/>
+                      <a:tailEnd type="none" w="med" len="med"/>
+                    </a:lnT>
+                    <a:lnB w="12700" cap="flat" cmpd="sng" algn="ctr">
+                      <a:solidFill>
+                        <a:srgbClr val="DDDAE8"/>
+                      </a:solidFill>
+                      <a:prstDash val="solid"/>
+                      <a:round/>
+                      <a:headEnd type="none" w="med" len="med"/>
+                      <a:tailEnd type="none" w="med" len="med"/>
+                    </a:lnB>
+                    <a:solidFill>
+                      <a:srgbClr val="FFFFFF"/>
+                    </a:solidFill>
+                  </a:tcPr>
+                </a:tc>
+                <a:tc>
+                  <a:txBody>
+                    <a:bodyPr/>
+                    <a:lstStyle/>
+                    <a:p>
+                      <a:pPr algn="ctr" indent="0" marL="0">
+                        <a:buNone/>
+                      </a:pPr>
+                      <a:r>
+                        <a:rPr lang="en-US" sz="1200" dirty="0">
+                          <a:solidFill>
+                            <a:srgbClr val="17152B"/>
+                          </a:solidFill>
+                        </a:rPr>
+                        <a:t>8</a:t>
+                      </a:r>
+                      <a:endParaRPr lang="en-US" sz="1200" dirty="0"/>
+                    </a:p>
+                  </a:txBody>
+                  <a:tcPr marL="91440" marR="91440" marT="45720" marB="45720" anchor="ctr">
+                    <a:lnL w="12700" cap="flat" cmpd="sng" algn="ctr">
+                      <a:solidFill>
+                        <a:srgbClr val="DDDAE8"/>
+                      </a:solidFill>
+                      <a:prstDash val="solid"/>
+                      <a:round/>
+                      <a:headEnd type="none" w="med" len="med"/>
+                      <a:tailEnd type="none" w="med" len="med"/>
+                    </a:lnL>
+                    <a:lnR w="12700" cap="flat" cmpd="sng" algn="ctr">
+                      <a:solidFill>
+                        <a:srgbClr val="DDDAE8"/>
+                      </a:solidFill>
+                      <a:prstDash val="solid"/>
+                      <a:round/>
+                      <a:headEnd type="none" w="med" len="med"/>
+                      <a:tailEnd type="none" w="med" len="med"/>
+                    </a:lnR>
+                    <a:lnT w="12700" cap="flat" cmpd="sng" algn="ctr">
+                      <a:solidFill>
+                        <a:srgbClr val="DDDAE8"/>
+                      </a:solidFill>
+                      <a:prstDash val="solid"/>
+                      <a:round/>
+                      <a:headEnd type="none" w="med" len="med"/>
+                      <a:tailEnd type="none" w="med" len="med"/>
+                    </a:lnT>
+                    <a:lnB w="12700" cap="flat" cmpd="sng" algn="ctr">
+                      <a:solidFill>
+                        <a:srgbClr val="DDDAE8"/>
+                      </a:solidFill>
+                      <a:prstDash val="solid"/>
+                      <a:round/>
+                      <a:headEnd type="none" w="med" len="med"/>
+                      <a:tailEnd type="none" w="med" len="med"/>
+                    </a:lnB>
+                    <a:solidFill>
+                      <a:srgbClr val="FFFFFF"/>
+                    </a:solidFill>
+                  </a:tcPr>
+                </a:tc>
+                <a:tc>
+                  <a:txBody>
+                    <a:bodyPr/>
+                    <a:lstStyle/>
+                    <a:p>
+                      <a:pPr algn="ctr" indent="0" marL="0">
+                        <a:buNone/>
+                      </a:pPr>
+                      <a:r>
+                        <a:rPr lang="en-US" sz="1200" dirty="0">
+                          <a:solidFill>
+                            <a:srgbClr val="17152B"/>
+                          </a:solidFill>
+                        </a:rPr>
+                        <a:t>1.04%</a:t>
+                      </a:r>
+                      <a:endParaRPr lang="en-US" sz="1200" dirty="0"/>
+                    </a:p>
+                  </a:txBody>
+                  <a:tcPr marL="91440" marR="91440" marT="45720" marB="45720" anchor="ctr">
+                    <a:lnL w="12700" cap="flat" cmpd="sng" algn="ctr">
+                      <a:solidFill>
+                        <a:srgbClr val="DDDAE8"/>
+                      </a:solidFill>
+                      <a:prstDash val="solid"/>
+                      <a:round/>
+                      <a:headEnd type="none" w="med" len="med"/>
+                      <a:tailEnd type="none" w="med" len="med"/>
+                    </a:lnL>
+                    <a:lnR w="12700" cap="flat" cmpd="sng" algn="ctr">
+                      <a:solidFill>
+                        <a:srgbClr val="DDDAE8"/>
+                      </a:solidFill>
+                      <a:prstDash val="solid"/>
+                      <a:round/>
+                      <a:headEnd type="none" w="med" len="med"/>
+                      <a:tailEnd type="none" w="med" len="med"/>
+                    </a:lnR>
+                    <a:lnT w="12700" cap="flat" cmpd="sng" algn="ctr">
+                      <a:solidFill>
+                        <a:srgbClr val="DDDAE8"/>
+                      </a:solidFill>
+                      <a:prstDash val="solid"/>
+                      <a:round/>
+                      <a:headEnd type="none" w="med" len="med"/>
+                      <a:tailEnd type="none" w="med" len="med"/>
+                    </a:lnT>
+                    <a:lnB w="12700" cap="flat" cmpd="sng" algn="ctr">
+                      <a:solidFill>
+                        <a:srgbClr val="DDDAE8"/>
+                      </a:solidFill>
+                      <a:prstDash val="solid"/>
+                      <a:round/>
+                      <a:headEnd type="none" w="med" len="med"/>
+                      <a:tailEnd type="none" w="med" len="med"/>
+                    </a:lnB>
+                    <a:solidFill>
+                      <a:srgbClr val="FFFFFF"/>
+                    </a:solidFill>
+                  </a:tcPr>
+                </a:tc>
+                <a:tc>
+                  <a:txBody>
+                    <a:bodyPr/>
+                    <a:lstStyle/>
+                    <a:p>
+                      <a:pPr algn="ctr" indent="0" marL="0">
+                        <a:buNone/>
+                      </a:pPr>
+                      <a:r>
+                        <a:rPr lang="en-US" sz="1200" dirty="0">
+                          <a:solidFill>
+                            <a:srgbClr val="17152B"/>
+                          </a:solidFill>
+                        </a:rPr>
+                        <a:t>0.0002%</a:t>
+                      </a:r>
+                      <a:endParaRPr lang="en-US" sz="1200" dirty="0"/>
+                    </a:p>
+                  </a:txBody>
+                  <a:tcPr marL="91440" marR="91440" marT="45720" marB="45720" anchor="ctr">
+                    <a:lnL w="12700" cap="flat" cmpd="sng" algn="ctr">
+                      <a:solidFill>
+                        <a:srgbClr val="DDDAE8"/>
+                      </a:solidFill>
+                      <a:prstDash val="solid"/>
+                      <a:round/>
+                      <a:headEnd type="none" w="med" len="med"/>
+                      <a:tailEnd type="none" w="med" len="med"/>
+                    </a:lnL>
+                    <a:lnR w="12700" cap="flat" cmpd="sng" algn="ctr">
+                      <a:solidFill>
+                        <a:srgbClr val="DDDAE8"/>
+                      </a:solidFill>
+                      <a:prstDash val="solid"/>
+                      <a:round/>
+                      <a:headEnd type="none" w="med" len="med"/>
+                      <a:tailEnd type="none" w="med" len="med"/>
+                    </a:lnR>
+                    <a:lnT w="12700" cap="flat" cmpd="sng" algn="ctr">
+                      <a:solidFill>
+                        <a:srgbClr val="DDDAE8"/>
+                      </a:solidFill>
+                      <a:prstDash val="solid"/>
+                      <a:round/>
+                      <a:headEnd type="none" w="med" len="med"/>
+                      <a:tailEnd type="none" w="med" len="med"/>
+                    </a:lnT>
+                    <a:lnB w="12700" cap="flat" cmpd="sng" algn="ctr">
+                      <a:solidFill>
+                        <a:srgbClr val="DDDAE8"/>
+                      </a:solidFill>
+                      <a:prstDash val="solid"/>
+                      <a:round/>
+                      <a:headEnd type="none" w="med" len="med"/>
+                      <a:tailEnd type="none" w="med" len="med"/>
+                    </a:lnB>
+                    <a:solidFill>
+                      <a:srgbClr val="FFFFFF"/>
+                    </a:solidFill>
+                  </a:tcPr>
+                </a:tc>
+                <a:tc>
+                  <a:txBody>
+                    <a:bodyPr/>
+                    <a:lstStyle/>
+                    <a:p>
+                      <a:pPr algn="ctr" indent="0" marL="0">
+                        <a:buNone/>
+                      </a:pPr>
+                      <a:r>
+                        <a:rPr lang="en-US" sz="1200" dirty="0">
+                          <a:solidFill>
+                            <a:srgbClr val="17152B"/>
+                          </a:solidFill>
+                        </a:rPr>
+                        <a:t>×5457</a:t>
+                      </a:r>
+                      <a:endParaRPr lang="en-US" sz="1200" dirty="0"/>
+                    </a:p>
+                  </a:txBody>
+                  <a:tcPr marL="91440" marR="91440" marT="45720" marB="45720" anchor="ctr">
+                    <a:lnL w="12700" cap="flat" cmpd="sng" algn="ctr">
+                      <a:solidFill>
+                        <a:srgbClr val="DDDAE8"/>
+                      </a:solidFill>
+                      <a:prstDash val="solid"/>
+                      <a:round/>
+                      <a:headEnd type="none" w="med" len="med"/>
+                      <a:tailEnd type="none" w="med" len="med"/>
+                    </a:lnL>
+                    <a:lnR w="12700" cap="flat" cmpd="sng" algn="ctr">
+                      <a:solidFill>
+                        <a:srgbClr val="DDDAE8"/>
+                      </a:solidFill>
+                      <a:prstDash val="solid"/>
+                      <a:round/>
+                      <a:headEnd type="none" w="med" len="med"/>
+                      <a:tailEnd type="none" w="med" len="med"/>
+                    </a:lnR>
+                    <a:lnT w="12700" cap="flat" cmpd="sng" algn="ctr">
+                      <a:solidFill>
+                        <a:srgbClr val="DDDAE8"/>
+                      </a:solidFill>
+                      <a:prstDash val="solid"/>
+                      <a:round/>
+                      <a:headEnd type="none" w="med" len="med"/>
+                      <a:tailEnd type="none" w="med" len="med"/>
+                    </a:lnT>
+                    <a:lnB w="12700" cap="flat" cmpd="sng" algn="ctr">
+                      <a:solidFill>
+                        <a:srgbClr val="DDDAE8"/>
+                      </a:solidFill>
+                      <a:prstDash val="solid"/>
+                      <a:round/>
+                      <a:headEnd type="none" w="med" len="med"/>
+                      <a:tailEnd type="none" w="med" len="med"/>
+                    </a:lnB>
+                    <a:solidFill>
+                      <a:srgbClr val="FFFFFF"/>
+                    </a:solidFill>
+                  </a:tcPr>
+                </a:tc>
+              </a:tr>
             </a:tbl>
           </a:graphicData>
         </a:graphic>
@@ -6761,12 +7190,26 @@
               <a:buNone/>
             </a:pPr>
             <a:r>
+              <a:rPr lang="en-US" sz="1400" b="1" dirty="0">
+                <a:solidFill>
+                  <a:schemeClr val="tx1"/>
+                </a:solidFill>
+              </a:rPr>
+              <a:t>N = 4 ran on AWS SV1: 884 of 2000 shots = 44.20% measured, against 44.62% predicted. Inside sampling error.</a:t>
+            </a:r>
+            <a:endParaRPr lang="en-US" sz="1400" dirty="0"/>
+          </a:p>
+          <a:p>
+            <a:pPr indent="0" marL="0">
+              <a:buNone/>
+            </a:pPr>
+            <a:r>
               <a:rPr lang="en-US" sz="1400" dirty="0">
                 <a:solidFill>
                   <a:schemeClr val="tx1"/>
                 </a:solidFill>
               </a:rPr>
-              <a:t>The lift over random grows with N — but the absolute success rate falls, because the solution fraction shrinks faster than the algorithm gains. </a:t>
+              <a:t>The lift over random grows with N, but the absolute success rate falls, because the solution fraction shrinks faster than the algorithm gains. </a:t>
             </a:r>
             <a:pPr indent="0" marL="0">
               <a:buNone/>
@@ -6813,7 +7256,7 @@
                   <a:srgbClr val="7C7A94"/>
                 </a:solidFill>
               </a:rPr>
-              <a:t>Puzzles with N &gt; 4 from the starter's make_puzzle(n, seed): N=5 seed 16, N=6 seed 86. Every N re-verified against the classical cost, and its alias map re-searched, before any angle search.</a:t>
+              <a:t>Puzzles with N &gt; 4 from the starter's make_puzzle(n, seed): N=5 seed 16, N=6 seed 86, N=7 seed 68. Every N re-verified against the classical cost, and its alias map re-searched, before any angle search.</a:t>
             </a:r>
             <a:endParaRPr lang="en-US" sz="1100" dirty="0"/>
           </a:p>
